--- a/latex/figures/framework_0526.pptx
+++ b/latex/figures/framework_0526.pptx
@@ -3664,7 +3664,7 @@
                 <a:latin typeface="Times New Roman" panose="02020603050405020304" pitchFamily="18" charset="0"/>
                 <a:cs typeface="Times New Roman" panose="02020603050405020304" pitchFamily="18" charset="0"/>
               </a:rPr>
-              <a:t>Unified</a:t>
+              <a:t>OPD Integration</a:t>
             </a:r>
             <a:r>
               <a:rPr lang="zh-CN" altLang="en-US" sz="2200" b="1" dirty="0">
@@ -4875,7 +4875,7 @@
                   <a:latin typeface="Times New Roman" panose="02020603050405020304" pitchFamily="18" charset="0"/>
                   <a:cs typeface="Times New Roman" panose="02020603050405020304" pitchFamily="18" charset="0"/>
                 </a:rPr>
-                <a:t>Unified OPD method library</a:t>
+                <a:t>Released OPD methods</a:t>
               </a:r>
               <a:endParaRPr lang="en" altLang="zh-CN" sz="1400" dirty="0">
                 <a:solidFill>
@@ -5011,7 +5011,7 @@
                   <a:latin typeface="Times New Roman" panose="02020603050405020304" pitchFamily="18" charset="0"/>
                   <a:cs typeface="Times New Roman" panose="02020603050405020304" pitchFamily="18" charset="0"/>
                 </a:rPr>
-                <a:t>MiniLLM</a:t>
+                <a:t/>
               </a:r>
               <a:endParaRPr sz="869" b="1" dirty="0">
                 <a:solidFill>
@@ -5079,7 +5079,7 @@
                   <a:latin typeface="Times New Roman" panose="02020603050405020304" pitchFamily="18" charset="0"/>
                   <a:cs typeface="Times New Roman" panose="02020603050405020304" pitchFamily="18" charset="0"/>
                 </a:rPr>
-                <a:t>OPSD</a:t>
+                <a:t>SDPO</a:t>
               </a:r>
               <a:endParaRPr sz="869" b="1" dirty="0">
                 <a:solidFill>
@@ -5147,7 +5147,7 @@
                   <a:latin typeface="Times New Roman" panose="02020603050405020304" pitchFamily="18" charset="0"/>
                   <a:cs typeface="Times New Roman" panose="02020603050405020304" pitchFamily="18" charset="0"/>
                 </a:rPr>
-                <a:t>SRPO</a:t>
+                <a:t/>
               </a:r>
               <a:endParaRPr sz="869" b="1" dirty="0">
                 <a:solidFill>
@@ -7489,7 +7489,7 @@
                 <a:latin typeface="Times New Roman" panose="02020603050405020304" pitchFamily="18" charset="0"/>
                 <a:cs typeface="Times New Roman" panose="02020603050405020304" pitchFamily="18" charset="0"/>
               </a:rPr>
-              <a:t>Unify OPD methods</a:t>
+              <a:t>Localize method-specific supervision</a:t>
             </a:r>
             <a:r>
               <a:rPr lang="en" sz="1400" dirty="0">
@@ -7782,7 +7782,7 @@
                 </a:solidFill>
                 <a:latin typeface="Aptos"/>
               </a:rPr>
-              <a:t>Switch</a:t>
+              <a:t>Select</a:t>
             </a:r>
             <a:r>
               <a:rPr lang="zh-CN" altLang="en-US" sz="1400" b="1" dirty="0">
@@ -7800,7 +7800,7 @@
                 </a:solidFill>
                 <a:latin typeface="Aptos"/>
               </a:rPr>
-              <a:t>methods</a:t>
+              <a:t>released methods</a:t>
             </a:r>
           </a:p>
           <a:p>
@@ -7812,7 +7812,7 @@
                 </a:solidFill>
                 <a:latin typeface="Aptos"/>
               </a:rPr>
-              <a:t> by</a:t>
+              <a:t> through</a:t>
             </a:r>
             <a:r>
               <a:rPr lang="zh-CN" altLang="en-US" sz="1400" b="1" dirty="0">
@@ -7830,7 +7830,7 @@
                 </a:solidFill>
                 <a:latin typeface="Aptos"/>
               </a:rPr>
-              <a:t>changing YAML only</a:t>
+              <a:t>YAML configurations</a:t>
             </a:r>
             <a:r>
               <a:rPr lang="en-US" altLang="zh-CN" sz="1400" b="1" dirty="0">
@@ -8435,7 +8435,7 @@
                 <a:latin typeface="Times New Roman" panose="02020603050405020304" pitchFamily="18" charset="0"/>
                 <a:cs typeface="Times New Roman" panose="02020603050405020304" pitchFamily="18" charset="0"/>
               </a:rPr>
-              <a:t>Preserve </a:t>
+              <a:t>Reuse </a:t>
             </a:r>
             <a:r>
               <a:rPr lang="en" altLang="zh-CN" sz="1200" b="1" dirty="0" err="1">
@@ -8455,7 +8455,7 @@
                 <a:latin typeface="Times New Roman" panose="02020603050405020304" pitchFamily="18" charset="0"/>
                 <a:cs typeface="Times New Roman" panose="02020603050405020304" pitchFamily="18" charset="0"/>
               </a:rPr>
-              <a:t> as the stable execution substrate</a:t>
+              <a:t> for rollout, optimization, and distributed execution</a:t>
             </a:r>
           </a:p>
         </p:txBody>
